--- a/dist/第2回/第2回_スライド_ストリームと文字コード.pptx
+++ b/dist/第2回/第2回_スライド_ストリームと文字コード.pptx
@@ -528,7 +528,7 @@
           <a:p>
             <a:r>
               <a:rPr lang="ja-JP" altLang="en-US" dirty="0"/>
-              <a:t>第1回の続きです。第1回は、つながるかつながらないかでした。今日は、つながった線の上を何が流れているかです。最後に言えるようになってほしいのは一つだけ、「固まったとき、相手は何を待っているのか」です。</a:t>
+              <a:t/>
             </a:r>
             <a:endParaRPr lang="ja-JP" altLang="en-US" dirty="0"/>
           </a:p>
@@ -551,7 +551,7 @@
           <a:p>
             <a:fld id="{F7021451-1387-4CA6-816F-3879F97B5CBC}" type="slidenum">
               <a:rPr lang="ja-JP" altLang="en-US"/>
-              <a:t>1</a:t>
+              <a:t/>
             </a:fld>
             <a:endParaRPr lang="ja-JP" altLang="en-US"/>
           </a:p>
@@ -616,7 +616,7 @@
           <a:p>
             <a:r>
               <a:rPr lang="ja-JP" altLang="en-US" dirty="0"/>
-              <a:t>ここは必ず読み上げてください。省略したコードは、隣の席と結果が変わります。演習でも課題でも文字コードを全部明示させるのは、主にこの理由です。</a:t>
+              <a:t/>
             </a:r>
             <a:endParaRPr lang="ja-JP" altLang="en-US" dirty="0"/>
           </a:p>
@@ -639,7 +639,7 @@
           <a:p>
             <a:fld id="{F7021451-1387-4CA6-816F-3879F97B5CBC}" type="slidenum">
               <a:rPr lang="ja-JP" altLang="en-US"/>
-              <a:t>10</a:t>
+              <a:t/>
             </a:fld>
             <a:endParaRPr lang="ja-JP" altLang="en-US"/>
           </a:p>
@@ -704,7 +704,7 @@
           <a:p>
             <a:r>
               <a:rPr lang="ja-JP" altLang="en-US" dirty="0"/>
-              <a:t>第1回のルールはそのままです。そのうえで、今日はこの3つが頻出します。特に3つ目が、今日いちばん多い「固まる」の原因になります。</a:t>
+              <a:t/>
             </a:r>
             <a:endParaRPr lang="ja-JP" altLang="en-US" dirty="0"/>
           </a:p>
@@ -727,7 +727,7 @@
           <a:p>
             <a:fld id="{F7021451-1387-4CA6-816F-3879F97B5CBC}" type="slidenum">
               <a:rPr lang="ja-JP" altLang="en-US"/>
-              <a:t>11</a:t>
+              <a:t/>
             </a:fld>
             <a:endParaRPr lang="ja-JP" altLang="en-US"/>
           </a:p>
@@ -792,7 +792,7 @@
           <a:p>
             <a:r>
               <a:rPr lang="ja-JP" altLang="en-US" dirty="0"/>
-              <a:t>55分の内訳です。演習Cを飛ばすと今日は何も残りません。時間が押したら演習Dを削ります。演習Dは宿題の必須要素ではありません。</a:t>
+              <a:t/>
             </a:r>
             <a:endParaRPr lang="ja-JP" altLang="en-US" dirty="0"/>
           </a:p>
@@ -815,7 +815,7 @@
           <a:p>
             <a:fld id="{F7021451-1387-4CA6-816F-3879F97B5CBC}" type="slidenum">
               <a:rPr lang="ja-JP" altLang="en-US"/>
-              <a:t>12</a:t>
+              <a:t/>
             </a:fld>
             <a:endParaRPr lang="ja-JP" altLang="en-US"/>
           </a:p>
@@ -880,7 +880,7 @@
           <a:p>
             <a:r>
               <a:rPr lang="ja-JP" altLang="en-US" dirty="0"/>
-              <a:t>第1回でいちばん多かった質問が、サーバのウィンドウが固まって見える、でした。先に言っておいてください。</a:t>
+              <a:t/>
             </a:r>
             <a:endParaRPr lang="ja-JP" altLang="en-US" dirty="0"/>
           </a:p>
@@ -903,7 +903,7 @@
           <a:p>
             <a:fld id="{F7021451-1387-4CA6-816F-3879F97B5CBC}" type="slidenum">
               <a:rPr lang="ja-JP" altLang="en-US"/>
-              <a:t>13</a:t>
+              <a:t/>
             </a:fld>
             <a:endParaRPr lang="ja-JP" altLang="en-US"/>
           </a:p>
@@ -968,7 +968,7 @@
           <a:p>
             <a:r>
               <a:rPr lang="ja-JP" altLang="en-US" dirty="0"/>
-              <a:t>提案が出たら、Tabの前に2点だけ確認させてください。getBytesが引数なしでないか、flushがあるか。それだけです。</a:t>
+              <a:t/>
             </a:r>
             <a:endParaRPr lang="ja-JP" altLang="en-US" dirty="0"/>
           </a:p>
@@ -991,7 +991,7 @@
           <a:p>
             <a:fld id="{F7021451-1387-4CA6-816F-3879F97B5CBC}" type="slidenum">
               <a:rPr lang="ja-JP" altLang="en-US"/>
-              <a:t>14</a:t>
+              <a:t/>
             </a:fld>
             <a:endParaRPr lang="ja-JP" altLang="en-US"/>
           </a:p>
@@ -1056,7 +1056,7 @@
           <a:p>
             <a:r>
               <a:rPr lang="ja-JP" altLang="en-US" dirty="0"/>
-              <a:t>ここで初めて、文字数とバイト数が別物だと見えます。0Aが1バイトの文字として確かに送られていることを、画面で確認させてください。</a:t>
+              <a:t/>
             </a:r>
             <a:endParaRPr lang="ja-JP" altLang="en-US" dirty="0"/>
           </a:p>
@@ -1079,7 +1079,7 @@
           <a:p>
             <a:fld id="{F7021451-1387-4CA6-816F-3879F97B5CBC}" type="slidenum">
               <a:rPr lang="ja-JP" altLang="en-US"/>
-              <a:t>15</a:t>
+              <a:t/>
             </a:fld>
             <a:endParaRPr lang="ja-JP" altLang="en-US"/>
           </a:p>
@@ -1144,7 +1144,7 @@
           <a:p>
             <a:r>
               <a:rPr lang="ja-JP" altLang="en-US" dirty="0"/>
-              <a:t>5かける3足す1が16になることを、自分で確かめさせてください。計算が合うという体験が、このあとのB-2で効きます。</a:t>
+              <a:t/>
             </a:r>
             <a:endParaRPr lang="ja-JP" altLang="en-US" dirty="0"/>
           </a:p>
@@ -1167,7 +1167,7 @@
           <a:p>
             <a:fld id="{F7021451-1387-4CA6-816F-3879F97B5CBC}" type="slidenum">
               <a:rPr lang="ja-JP" altLang="en-US"/>
-              <a:t>16</a:t>
+              <a:t/>
             </a:fld>
             <a:endParaRPr lang="ja-JP" altLang="en-US"/>
           </a:p>
@@ -1232,7 +1232,7 @@
           <a:p>
             <a:r>
               <a:rPr lang="ja-JP" altLang="en-US" dirty="0"/>
-              <a:t>ここで全員の手を止めてください。送信側は一切変えません。最後の1行だけを変えさせます。</a:t>
+              <a:t/>
             </a:r>
             <a:endParaRPr lang="ja-JP" altLang="en-US" dirty="0"/>
           </a:p>
@@ -1255,7 +1255,7 @@
           <a:p>
             <a:fld id="{F7021451-1387-4CA6-816F-3879F97B5CBC}" type="slidenum">
               <a:rPr lang="ja-JP" altLang="en-US"/>
-              <a:t>17</a:t>
+              <a:t/>
             </a:fld>
             <a:endParaRPr lang="ja-JP" altLang="en-US"/>
           </a:p>
@@ -1320,7 +1320,7 @@
           <a:p>
             <a:r>
               <a:rPr lang="ja-JP" altLang="en-US" dirty="0"/>
-              <a:t>HEXの行が同じであることを、必ず自分の目で確認させてください。ネットワークは何も間違えていません。</a:t>
+              <a:t/>
             </a:r>
             <a:endParaRPr lang="ja-JP" altLang="en-US" dirty="0"/>
           </a:p>
@@ -1343,7 +1343,7 @@
           <a:p>
             <a:fld id="{F7021451-1387-4CA6-816F-3879F97B5CBC}" type="slidenum">
               <a:rPr lang="ja-JP" altLang="en-US"/>
-              <a:t>18</a:t>
+              <a:t/>
             </a:fld>
             <a:endParaRPr lang="ja-JP" altLang="en-US"/>
           </a:p>
@@ -1408,7 +1408,7 @@
           <a:p>
             <a:r>
               <a:rPr lang="ja-JP" altLang="en-US" dirty="0"/>
-              <a:t>全員の手を止めてください。まずスライド8に書いた仮説を読み返させてから、動かさせます。エラーが出ると書いた人が多いはずです。</a:t>
+              <a:t/>
             </a:r>
             <a:endParaRPr lang="ja-JP" altLang="en-US" dirty="0"/>
           </a:p>
@@ -1431,7 +1431,7 @@
           <a:p>
             <a:fld id="{F7021451-1387-4CA6-816F-3879F97B5CBC}" type="slidenum">
               <a:rPr lang="ja-JP" altLang="en-US"/>
-              <a:t>19</a:t>
+              <a:t/>
             </a:fld>
             <a:endParaRPr lang="ja-JP" altLang="en-US"/>
           </a:p>
@@ -1496,7 +1496,7 @@
           <a:p>
             <a:r>
               <a:rPr lang="ja-JP" altLang="en-US" dirty="0"/>
-              <a:t>この対称性が今日の設計です。第1回は、つながるかどうかで止まりました。今日は、つながったあとで止まります。しかも今日は例外が出ません。黙って止まります。</a:t>
+              <a:t/>
             </a:r>
             <a:endParaRPr lang="ja-JP" altLang="en-US" dirty="0"/>
           </a:p>
@@ -1519,7 +1519,7 @@
           <a:p>
             <a:fld id="{F7021451-1387-4CA6-816F-3879F97B5CBC}" type="slidenum">
               <a:rPr lang="ja-JP" altLang="en-US"/>
-              <a:t>2</a:t>
+              <a:t/>
             </a:fld>
             <a:endParaRPr lang="ja-JP" altLang="en-US"/>
           </a:p>
@@ -1584,7 +1584,7 @@
           <a:p>
             <a:r>
               <a:rPr lang="ja-JP" altLang="en-US" dirty="0"/>
-              <a:t>改行を戻してから、今度はflushの行だけをコメントアウトさせます。同じ固まるでも原因が複数あることを、ここで体に入れます。</a:t>
+              <a:t/>
             </a:r>
             <a:endParaRPr lang="ja-JP" altLang="en-US" dirty="0"/>
           </a:p>
@@ -1607,7 +1607,7 @@
           <a:p>
             <a:fld id="{F7021451-1387-4CA6-816F-3879F97B5CBC}" type="slidenum">
               <a:rPr lang="ja-JP" altLang="en-US"/>
-              <a:t>20</a:t>
+              <a:t/>
             </a:fld>
             <a:endParaRPr lang="ja-JP" altLang="en-US"/>
           </a:p>
@@ -1672,7 +1672,7 @@
           <a:p>
             <a:r>
               <a:rPr lang="ja-JP" altLang="en-US" dirty="0"/>
-              <a:t>故障ではなく取り決めの差です。第6回のHTTPでは逆に0D 0Aが必須になります。そのとき、どちらでもいいではないことを今日知っておいてもらいます。</a:t>
+              <a:t/>
             </a:r>
             <a:endParaRPr lang="ja-JP" altLang="en-US" dirty="0"/>
           </a:p>
@@ -1695,7 +1695,7 @@
           <a:p>
             <a:fld id="{F7021451-1387-4CA6-816F-3879F97B5CBC}" type="slidenum">
               <a:rPr lang="ja-JP" altLang="en-US"/>
-              <a:t>21</a:t>
+              <a:t/>
             </a:fld>
             <a:endParaRPr lang="ja-JP" altLang="en-US"/>
           </a:p>
@@ -1760,7 +1760,7 @@
           <a:p>
             <a:r>
               <a:rPr lang="ja-JP" altLang="en-US" dirty="0"/>
-              <a:t>3つとも、コンパイルは通り、例外も出ません。動かないではなく黙る。今日その黙り方を3種類見たことが、この回のいちばんの収穫です。</a:t>
+              <a:t/>
             </a:r>
             <a:endParaRPr lang="ja-JP" altLang="en-US" dirty="0"/>
           </a:p>
@@ -1783,7 +1783,7 @@
           <a:p>
             <a:fld id="{F7021451-1387-4CA6-816F-3879F97B5CBC}" type="slidenum">
               <a:rPr lang="ja-JP" altLang="en-US"/>
-              <a:t>22</a:t>
+              <a:t/>
             </a:fld>
             <a:endParaRPr lang="ja-JP" altLang="en-US"/>
           </a:p>
@@ -1848,7 +1848,7 @@
           <a:p>
             <a:r>
               <a:rPr lang="ja-JP" altLang="en-US" dirty="0"/>
-              <a:t>行数が激減します。その代わりに何を手放したかを、次のスライドで確認します。</a:t>
+              <a:t/>
             </a:r>
             <a:endParaRPr lang="ja-JP" altLang="en-US" dirty="0"/>
           </a:p>
@@ -1871,7 +1871,7 @@
           <a:p>
             <a:fld id="{F7021451-1387-4CA6-816F-3879F97B5CBC}" type="slidenum">
               <a:rPr lang="ja-JP" altLang="en-US"/>
-              <a:t>23</a:t>
+              <a:t/>
             </a:fld>
             <a:endParaRPr lang="ja-JP" altLang="en-US"/>
           </a:p>
@@ -1936,7 +1936,7 @@
           <a:p>
             <a:r>
               <a:rPr lang="ja-JP" altLang="en-US" dirty="0"/>
-              <a:t>ライブラリが肩代わりしたのは手間であって責任ではありません。今日の3つの実験は、すべて下2行に関する事故でした。</a:t>
+              <a:t/>
             </a:r>
             <a:endParaRPr lang="ja-JP" altLang="en-US" dirty="0"/>
           </a:p>
@@ -1959,7 +1959,7 @@
           <a:p>
             <a:fld id="{F7021451-1387-4CA6-816F-3879F97B5CBC}" type="slidenum">
               <a:rPr lang="ja-JP" altLang="en-US"/>
-              <a:t>24</a:t>
+              <a:t/>
             </a:fld>
             <a:endParaRPr lang="ja-JP" altLang="en-US"/>
           </a:p>
@@ -2024,7 +2024,7 @@
           <a:p>
             <a:r>
               <a:rPr lang="ja-JP" altLang="en-US" dirty="0"/>
-              <a:t>演習BのBytes.javaに、引数処理と出力形式を足すだけです。送受信の処理そのものは10行程度だと言ってあげてください。</a:t>
+              <a:t/>
             </a:r>
             <a:endParaRPr lang="ja-JP" altLang="en-US" dirty="0"/>
           </a:p>
@@ -2047,7 +2047,7 @@
           <a:p>
             <a:fld id="{F7021451-1387-4CA6-816F-3879F97B5CBC}" type="slidenum">
               <a:rPr lang="ja-JP" altLang="en-US"/>
-              <a:t>25</a:t>
+              <a:t/>
             </a:fld>
             <a:endParaRPr lang="ja-JP" altLang="en-US"/>
           </a:p>
@@ -2112,7 +2112,7 @@
           <a:p>
             <a:r>
               <a:rPr lang="ja-JP" altLang="en-US" dirty="0"/>
-              <a:t>ケース1と2を見比べさせてください。どちらも5文字なのに、バイト数は6と16です。この課題で確認したいのはこの1点です。ケース3のMATCH=falseはバグではなく正解です。</a:t>
+              <a:t/>
             </a:r>
             <a:endParaRPr lang="ja-JP" altLang="en-US" dirty="0"/>
           </a:p>
@@ -2135,7 +2135,7 @@
           <a:p>
             <a:fld id="{F7021451-1387-4CA6-816F-3879F97B5CBC}" type="slidenum">
               <a:rPr lang="ja-JP" altLang="en-US"/>
-              <a:t>26</a:t>
+              <a:t/>
             </a:fld>
             <a:endParaRPr lang="ja-JP" altLang="en-US"/>
           </a:p>
@@ -2200,7 +2200,7 @@
           <a:p>
             <a:r>
               <a:rPr lang="ja-JP" altLang="en-US" dirty="0"/>
-              <a:t>最後に学生に声に出して読ませてください。これが今日の軸文です。次回は、今日ずっと待っていたその相手を、自分で書きます。</a:t>
+              <a:t/>
             </a:r>
             <a:endParaRPr lang="ja-JP" altLang="en-US" dirty="0"/>
           </a:p>
@@ -2223,7 +2223,7 @@
           <a:p>
             <a:fld id="{F7021451-1387-4CA6-816F-3879F97B5CBC}" type="slidenum">
               <a:rPr lang="ja-JP" altLang="en-US"/>
-              <a:t>27</a:t>
+              <a:t/>
             </a:fld>
             <a:endParaRPr lang="ja-JP" altLang="en-US"/>
           </a:p>
@@ -2288,7 +2288,7 @@
           <a:p>
             <a:r>
               <a:rPr lang="ja-JP" altLang="en-US" dirty="0"/>
-              <a:t>第1回で書いた最後の1行です。ここまでで、まだ1バイトも送っていません。接続とは、送る準備ができた状態にすぎない、ということを確認してください。</a:t>
+              <a:t/>
             </a:r>
             <a:endParaRPr lang="ja-JP" altLang="en-US" dirty="0"/>
           </a:p>
@@ -2311,7 +2311,7 @@
           <a:p>
             <a:fld id="{F7021451-1387-4CA6-816F-3879F97B5CBC}" type="slidenum">
               <a:rPr lang="ja-JP" altLang="en-US"/>
-              <a:t>3</a:t>
+              <a:t/>
             </a:fld>
             <a:endParaRPr lang="ja-JP" altLang="en-US"/>
           </a:p>
@@ -2376,7 +2376,7 @@
           <a:p>
             <a:r>
               <a:rPr lang="ja-JP" altLang="en-US" dirty="0"/>
-              <a:t>ソケットから出てくるのはバイトだけです。文字も行も、後から人間が乗せた解釈です。この3段が、そのまま今日の演習A、B、Dに対応します。</a:t>
+              <a:t/>
             </a:r>
             <a:endParaRPr lang="ja-JP" altLang="en-US" dirty="0"/>
           </a:p>
@@ -2399,7 +2399,7 @@
           <a:p>
             <a:fld id="{F7021451-1387-4CA6-816F-3879F97B5CBC}" type="slidenum">
               <a:rPr lang="ja-JP" altLang="en-US"/>
-              <a:t>4</a:t>
+              <a:t/>
             </a:fld>
             <a:endParaRPr lang="ja-JP" altLang="en-US"/>
           </a:p>
@@ -2464,7 +2464,7 @@
           <a:p>
             <a:r>
               <a:rPr lang="ja-JP" altLang="en-US" dirty="0"/>
-              <a:t>readLine の1行が、実は3段ぶんの処理だということです。この3つのうちどれが止まっても、症状は同じ「返ってこない」になります。</a:t>
+              <a:t/>
             </a:r>
             <a:endParaRPr lang="ja-JP" altLang="en-US" dirty="0"/>
           </a:p>
@@ -2487,7 +2487,7 @@
           <a:p>
             <a:fld id="{F7021451-1387-4CA6-816F-3879F97B5CBC}" type="slidenum">
               <a:rPr lang="ja-JP" altLang="en-US"/>
-              <a:t>5</a:t>
+              <a:t/>
             </a:fld>
             <a:endParaRPr lang="ja-JP" altLang="en-US"/>
           </a:p>
@@ -2552,7 +2552,7 @@
           <a:p>
             <a:r>
               <a:rPr lang="ja-JP" altLang="en-US" dirty="0"/>
-              <a:t>ここが、初めてネットワークを書く人がいちばん誤解するところです。TCPが保証するのはバイトの順番だけで、送った回数も1件の切れ目も保存されません。</a:t>
+              <a:t/>
             </a:r>
             <a:endParaRPr lang="ja-JP" altLang="en-US" dirty="0"/>
           </a:p>
@@ -2575,7 +2575,7 @@
           <a:p>
             <a:fld id="{F7021451-1387-4CA6-816F-3879F97B5CBC}" type="slidenum">
               <a:rPr lang="ja-JP" altLang="en-US"/>
-              <a:t>6</a:t>
+              <a:t/>
             </a:fld>
             <a:endParaRPr lang="ja-JP" altLang="en-US"/>
           </a:p>
@@ -2640,7 +2640,7 @@
           <a:p>
             <a:r>
               <a:rPr lang="ja-JP" altLang="en-US" dirty="0"/>
-              <a:t>行単位プロトコルという言葉は、これだけの意味です。難しい技術ではなく、送る側と受け取る側の約束です。</a:t>
+              <a:t/>
             </a:r>
             <a:endParaRPr lang="ja-JP" altLang="en-US" dirty="0"/>
           </a:p>
@@ -2663,7 +2663,7 @@
           <a:p>
             <a:fld id="{F7021451-1387-4CA6-816F-3879F97B5CBC}" type="slidenum">
               <a:rPr lang="ja-JP" altLang="en-US"/>
-              <a:t>7</a:t>
+              <a:t/>
             </a:fld>
             <a:endParaRPr lang="ja-JP" altLang="en-US"/>
           </a:p>
@@ -2728,7 +2728,7 @@
           <a:p>
             <a:r>
               <a:rPr lang="ja-JP" altLang="en-US" dirty="0"/>
-              <a:t>ここで答えは言いません。まず学生に仮説を配布資料のこのページに書かせてください。演習C-1のあとで、自分で採点させます。この1分が、今日の学習効果の測定装置です。</a:t>
+              <a:t/>
             </a:r>
             <a:endParaRPr lang="ja-JP" altLang="en-US" dirty="0"/>
           </a:p>
@@ -2751,7 +2751,7 @@
           <a:p>
             <a:fld id="{F7021451-1387-4CA6-816F-3879F97B5CBC}" type="slidenum">
               <a:rPr lang="ja-JP" altLang="en-US"/>
-              <a:t>8</a:t>
+              <a:t/>
             </a:fld>
             <a:endParaRPr lang="ja-JP" altLang="en-US"/>
           </a:p>
@@ -2816,7 +2816,7 @@
           <a:p>
             <a:r>
               <a:rPr lang="ja-JP" altLang="en-US" dirty="0"/>
-              <a:t>バイトは1つも壊れていません。壊れたのは解釈のほうです。文字化けとは破損ではなく読み間違いだ、という言い方を覚えて帰ってもらってください。</a:t>
+              <a:t/>
             </a:r>
             <a:endParaRPr lang="ja-JP" altLang="en-US" dirty="0"/>
           </a:p>
@@ -2839,7 +2839,7 @@
           <a:p>
             <a:fld id="{F7021451-1387-4CA6-816F-3879F97B5CBC}" type="slidenum">
               <a:rPr lang="ja-JP" altLang="en-US"/>
-              <a:t>9</a:t>
+              <a:t/>
             </a:fld>
             <a:endParaRPr lang="ja-JP" altLang="en-US"/>
           </a:p>
